--- a/clases/clase00/Clase_00_slides.pptx
+++ b/clases/clase00/Clase_00_slides.pptx
@@ -8593,7 +8593,7 @@
                 <a:ea typeface="Calibri" pitchFamily="34" charset="-122"/>
                 <a:cs typeface="Calibri" pitchFamily="34" charset="-120"/>
               </a:rPr>
-              <a:t>En caso de paro docente o situaciones que impidan el dictado presencial, la clase se realizará de forma virtual sincrónica.</a:t>
+              <a:t>En caso de paro docente o situaciones que impidan el dictado presencial, la clase no se realizará (ni presencial ni virtual).</a:t>
             </a:r>
             <a:endParaRPr lang="es-AR" sz="1050" noProof="0" dirty="0"/>
           </a:p>
@@ -8614,7 +8614,7 @@
                 <a:ea typeface="Calibri" pitchFamily="34" charset="-122"/>
                 <a:cs typeface="Calibri" pitchFamily="34" charset="-120"/>
               </a:rPr>
-              <a:t>Si se suspende la actividad universitaria, los materiales se compartirán de forma asincrónica y se reprogramará la clase.</a:t>
+              <a:t>Si se suspende la actividad universitaria, los materiales se compartirán de forma asincrónica. En muy pocos casos se reprogramará. Se intentará dar el material teórico junto al práctico en cuestión.</a:t>
             </a:r>
             <a:endParaRPr lang="es-AR" sz="1050" noProof="0" dirty="0"/>
           </a:p>
@@ -8627,6 +8627,17 @@
               <a:buChar char="•"/>
             </a:pPr>
             <a:r>
+              <a:rPr lang="es-AR" sz="1050" dirty="0">
+                <a:solidFill>
+                  <a:srgbClr val="5A7184"/>
+                </a:solidFill>
+                <a:latin typeface="Calibri" pitchFamily="34" charset="0"/>
+                <a:ea typeface="Calibri" pitchFamily="34" charset="-122"/>
+                <a:cs typeface="Calibri" pitchFamily="34" charset="-120"/>
+              </a:rPr>
+              <a:t>Solamente una excepción gigante va a ajustar los plazos de entrega</a:t>
+            </a:r>
+            <a:r>
               <a:rPr lang="es-AR" sz="1050" noProof="0" dirty="0">
                 <a:solidFill>
                   <a:srgbClr val="5A7184"/>
@@ -8635,7 +8646,18 @@
                 <a:ea typeface="Calibri" pitchFamily="34" charset="-122"/>
                 <a:cs typeface="Calibri" pitchFamily="34" charset="-120"/>
               </a:rPr>
-              <a:t>Los plazos de entregas de evaluaciones se ajustarán proporcionalmente.</a:t>
+              <a:t> de evaluaciones, ya que se intentará que el contenido no se </a:t>
+            </a:r>
+            <a:r>
+              <a:rPr lang="es-AR" sz="1050" noProof="0">
+                <a:solidFill>
+                  <a:srgbClr val="5A7184"/>
+                </a:solidFill>
+                <a:latin typeface="Calibri" pitchFamily="34" charset="0"/>
+                <a:ea typeface="Calibri" pitchFamily="34" charset="-122"/>
+                <a:cs typeface="Calibri" pitchFamily="34" charset="-120"/>
+              </a:rPr>
+              <a:t>vea afectado.</a:t>
             </a:r>
             <a:endParaRPr lang="es-AR" sz="1050" noProof="0" dirty="0"/>
           </a:p>
